--- a/Truman Live Paper.pptx
+++ b/Truman Live Paper.pptx
@@ -6,6 +6,7 @@
   </p:sldMasterIdLst>
   <p:sldIdLst>
     <p:sldId id="256" r:id="rId2"/>
+    <p:sldId id="257" r:id="rId3"/>
   </p:sldIdLst>
   <p:sldSz cx="12192000" cy="6858000"/>
   <p:notesSz cx="6858000" cy="9144000"/>
@@ -259,7 +260,7 @@
           <a:p>
             <a:fld id="{CF02990B-E4D7-9B42-913C-5A504358CBA1}" type="datetimeFigureOut">
               <a:rPr lang="en-US" smtClean="0"/>
-              <a:t>3/21/26</a:t>
+              <a:t>4/4/26</a:t>
             </a:fld>
             <a:endParaRPr lang="en-US"/>
           </a:p>
@@ -457,7 +458,7 @@
           <a:p>
             <a:fld id="{CF02990B-E4D7-9B42-913C-5A504358CBA1}" type="datetimeFigureOut">
               <a:rPr lang="en-US" smtClean="0"/>
-              <a:t>3/21/26</a:t>
+              <a:t>4/4/26</a:t>
             </a:fld>
             <a:endParaRPr lang="en-US"/>
           </a:p>
@@ -665,7 +666,7 @@
           <a:p>
             <a:fld id="{CF02990B-E4D7-9B42-913C-5A504358CBA1}" type="datetimeFigureOut">
               <a:rPr lang="en-US" smtClean="0"/>
-              <a:t>3/21/26</a:t>
+              <a:t>4/4/26</a:t>
             </a:fld>
             <a:endParaRPr lang="en-US"/>
           </a:p>
@@ -863,7 +864,7 @@
           <a:p>
             <a:fld id="{CF02990B-E4D7-9B42-913C-5A504358CBA1}" type="datetimeFigureOut">
               <a:rPr lang="en-US" smtClean="0"/>
-              <a:t>3/21/26</a:t>
+              <a:t>4/4/26</a:t>
             </a:fld>
             <a:endParaRPr lang="en-US"/>
           </a:p>
@@ -1138,7 +1139,7 @@
           <a:p>
             <a:fld id="{CF02990B-E4D7-9B42-913C-5A504358CBA1}" type="datetimeFigureOut">
               <a:rPr lang="en-US" smtClean="0"/>
-              <a:t>3/21/26</a:t>
+              <a:t>4/4/26</a:t>
             </a:fld>
             <a:endParaRPr lang="en-US"/>
           </a:p>
@@ -1403,7 +1404,7 @@
           <a:p>
             <a:fld id="{CF02990B-E4D7-9B42-913C-5A504358CBA1}" type="datetimeFigureOut">
               <a:rPr lang="en-US" smtClean="0"/>
-              <a:t>3/21/26</a:t>
+              <a:t>4/4/26</a:t>
             </a:fld>
             <a:endParaRPr lang="en-US"/>
           </a:p>
@@ -1815,7 +1816,7 @@
           <a:p>
             <a:fld id="{CF02990B-E4D7-9B42-913C-5A504358CBA1}" type="datetimeFigureOut">
               <a:rPr lang="en-US" smtClean="0"/>
-              <a:t>3/21/26</a:t>
+              <a:t>4/4/26</a:t>
             </a:fld>
             <a:endParaRPr lang="en-US"/>
           </a:p>
@@ -1956,7 +1957,7 @@
           <a:p>
             <a:fld id="{CF02990B-E4D7-9B42-913C-5A504358CBA1}" type="datetimeFigureOut">
               <a:rPr lang="en-US" smtClean="0"/>
-              <a:t>3/21/26</a:t>
+              <a:t>4/4/26</a:t>
             </a:fld>
             <a:endParaRPr lang="en-US"/>
           </a:p>
@@ -2069,7 +2070,7 @@
           <a:p>
             <a:fld id="{CF02990B-E4D7-9B42-913C-5A504358CBA1}" type="datetimeFigureOut">
               <a:rPr lang="en-US" smtClean="0"/>
-              <a:t>3/21/26</a:t>
+              <a:t>4/4/26</a:t>
             </a:fld>
             <a:endParaRPr lang="en-US"/>
           </a:p>
@@ -2380,7 +2381,7 @@
           <a:p>
             <a:fld id="{CF02990B-E4D7-9B42-913C-5A504358CBA1}" type="datetimeFigureOut">
               <a:rPr lang="en-US" smtClean="0"/>
-              <a:t>3/21/26</a:t>
+              <a:t>4/4/26</a:t>
             </a:fld>
             <a:endParaRPr lang="en-US"/>
           </a:p>
@@ -2668,7 +2669,7 @@
           <a:p>
             <a:fld id="{CF02990B-E4D7-9B42-913C-5A504358CBA1}" type="datetimeFigureOut">
               <a:rPr lang="en-US" smtClean="0"/>
-              <a:t>3/21/26</a:t>
+              <a:t>4/4/26</a:t>
             </a:fld>
             <a:endParaRPr lang="en-US"/>
           </a:p>
@@ -2909,7 +2910,7 @@
           <a:p>
             <a:fld id="{CF02990B-E4D7-9B42-913C-5A504358CBA1}" type="datetimeFigureOut">
               <a:rPr lang="en-US" smtClean="0"/>
-              <a:t>3/21/26</a:t>
+              <a:t>4/4/26</a:t>
             </a:fld>
             <a:endParaRPr lang="en-US"/>
           </a:p>
@@ -3361,7 +3362,7 @@
             </a:br>
             <a:r>
               <a:rPr lang="en-US" dirty="0"/>
-              <a:t>Mac Edition</a:t>
+              <a:t>Mountain Shane</a:t>
             </a:r>
           </a:p>
         </p:txBody>
@@ -3394,7 +3395,7 @@
           <a:p>
             <a:r>
               <a:rPr lang="en-US" dirty="0"/>
-              <a:t>Link https://</a:t>
+              <a:t>https://</a:t>
             </a:r>
             <a:r>
               <a:rPr lang="en-US" dirty="0" err="1"/>
@@ -3402,17 +3403,16 @@
             </a:r>
             <a:r>
               <a:rPr lang="en-US" dirty="0"/>
-              <a:t>/file/d/1mV3jQX0y-S2cnAfvItSbpjEmBxWZP4zr/</a:t>
+              <a:t>/file/d/1LA7H8OQyDGfowULOjMC-sJHG9y8VHzdN/</a:t>
             </a:r>
             <a:r>
               <a:rPr lang="en-US" dirty="0" err="1"/>
               <a:t>view?usp</a:t>
             </a:r>
             <a:r>
-              <a:rPr lang="en-US"/>
+              <a:rPr lang="en-US" dirty="0"/>
               <a:t>=sharing</a:t>
             </a:r>
-            <a:endParaRPr lang="en-US" dirty="0"/>
           </a:p>
         </p:txBody>
       </p:sp>
@@ -3420,6 +3420,135 @@
     <p:extLst>
       <p:ext uri="{BB962C8B-B14F-4D97-AF65-F5344CB8AC3E}">
         <p14:creationId xmlns:p14="http://schemas.microsoft.com/office/powerpoint/2010/main" val="2464476511"/>
+      </p:ext>
+    </p:extLst>
+  </p:cSld>
+  <p:clrMapOvr>
+    <a:masterClrMapping/>
+  </p:clrMapOvr>
+</p:sld>
+</file>
+
+<file path=ppt/slides/slide2.xml><?xml version="1.0" encoding="utf-8"?>
+<p:sld xmlns:a="http://schemas.openxmlformats.org/drawingml/2006/main" xmlns:r="http://schemas.openxmlformats.org/officeDocument/2006/relationships" xmlns:p="http://schemas.openxmlformats.org/presentationml/2006/main">
+  <p:cSld>
+    <p:spTree>
+      <p:nvGrpSpPr>
+        <p:cNvPr id="1" name="">
+          <a:extLst>
+            <a:ext uri="{FF2B5EF4-FFF2-40B4-BE49-F238E27FC236}">
+              <a16:creationId xmlns:a16="http://schemas.microsoft.com/office/drawing/2014/main" id="{880315BC-7FA0-6A5A-A270-35DF669C4988}"/>
+            </a:ext>
+          </a:extLst>
+        </p:cNvPr>
+        <p:cNvGrpSpPr/>
+        <p:nvPr/>
+      </p:nvGrpSpPr>
+      <p:grpSpPr>
+        <a:xfrm>
+          <a:off x="0" y="0"/>
+          <a:ext cx="0" cy="0"/>
+          <a:chOff x="0" y="0"/>
+          <a:chExt cx="0" cy="0"/>
+        </a:xfrm>
+      </p:grpSpPr>
+      <p:sp>
+        <p:nvSpPr>
+          <p:cNvPr id="2" name="Title 1">
+            <a:extLst>
+              <a:ext uri="{FF2B5EF4-FFF2-40B4-BE49-F238E27FC236}">
+                <a16:creationId xmlns:a16="http://schemas.microsoft.com/office/drawing/2014/main" id="{F709AA73-60D2-AA21-BC93-A3C76C7F1031}"/>
+              </a:ext>
+            </a:extLst>
+          </p:cNvPr>
+          <p:cNvSpPr>
+            <a:spLocks noGrp="1"/>
+          </p:cNvSpPr>
+          <p:nvPr>
+            <p:ph type="ctrTitle"/>
+          </p:nvPr>
+        </p:nvSpPr>
+        <p:spPr>
+          <a:xfrm>
+            <a:off x="1524000" y="45917"/>
+            <a:ext cx="9144000" cy="2387600"/>
+          </a:xfrm>
+        </p:spPr>
+        <p:txBody>
+          <a:bodyPr anchor="t"/>
+          <a:lstStyle/>
+          <a:p>
+            <a:r>
+              <a:rPr lang="en-US" dirty="0" err="1"/>
+              <a:t>TrumanLivePaper</a:t>
+            </a:r>
+            <a:br>
+              <a:rPr lang="en-US" dirty="0"/>
+            </a:br>
+            <a:r>
+              <a:rPr lang="en-US" dirty="0" err="1"/>
+              <a:t>Suneriser</a:t>
+            </a:r>
+            <a:r>
+              <a:rPr lang="en-US" dirty="0"/>
+              <a:t> Minimalist</a:t>
+            </a:r>
+          </a:p>
+        </p:txBody>
+      </p:sp>
+      <p:sp>
+        <p:nvSpPr>
+          <p:cNvPr id="3" name="Subtitle 2">
+            <a:extLst>
+              <a:ext uri="{FF2B5EF4-FFF2-40B4-BE49-F238E27FC236}">
+                <a16:creationId xmlns:a16="http://schemas.microsoft.com/office/drawing/2014/main" id="{81ED181B-29AE-176E-5F8A-D0AB235F29E3}"/>
+              </a:ext>
+            </a:extLst>
+          </p:cNvPr>
+          <p:cNvSpPr>
+            <a:spLocks noGrp="1"/>
+          </p:cNvSpPr>
+          <p:nvPr>
+            <p:ph type="subTitle" idx="1"/>
+          </p:nvPr>
+        </p:nvSpPr>
+        <p:spPr>
+          <a:xfrm>
+            <a:off x="1524000" y="1605636"/>
+            <a:ext cx="9144000" cy="1655762"/>
+          </a:xfrm>
+        </p:spPr>
+        <p:txBody>
+          <a:bodyPr/>
+          <a:lstStyle/>
+          <a:p>
+            <a:r>
+              <a:rPr lang="en-US" dirty="0"/>
+              <a:t>https://</a:t>
+            </a:r>
+            <a:r>
+              <a:rPr lang="en-US" dirty="0" err="1"/>
+              <a:t>drive.google.com</a:t>
+            </a:r>
+            <a:r>
+              <a:rPr lang="en-US" dirty="0"/>
+              <a:t>/file/d/1cwbVZ1vuR3hBV6mNGIj6tzpRRlQh1d3c/</a:t>
+            </a:r>
+            <a:r>
+              <a:rPr lang="en-US" dirty="0" err="1"/>
+              <a:t>view?usp</a:t>
+            </a:r>
+            <a:r>
+              <a:rPr lang="en-US" dirty="0"/>
+              <a:t>=sharing</a:t>
+            </a:r>
+          </a:p>
+        </p:txBody>
+      </p:sp>
+    </p:spTree>
+    <p:extLst>
+      <p:ext uri="{BB962C8B-B14F-4D97-AF65-F5344CB8AC3E}">
+        <p14:creationId xmlns:p14="http://schemas.microsoft.com/office/powerpoint/2010/main" val="1128975372"/>
       </p:ext>
     </p:extLst>
   </p:cSld>

--- a/Truman Live Paper.pptx
+++ b/Truman Live Paper.pptx
@@ -260,7 +260,7 @@
           <a:p>
             <a:fld id="{CF02990B-E4D7-9B42-913C-5A504358CBA1}" type="datetimeFigureOut">
               <a:rPr lang="en-US" smtClean="0"/>
-              <a:t>4/4/26</a:t>
+              <a:t>4/5/26</a:t>
             </a:fld>
             <a:endParaRPr lang="en-US"/>
           </a:p>
@@ -458,7 +458,7 @@
           <a:p>
             <a:fld id="{CF02990B-E4D7-9B42-913C-5A504358CBA1}" type="datetimeFigureOut">
               <a:rPr lang="en-US" smtClean="0"/>
-              <a:t>4/4/26</a:t>
+              <a:t>4/5/26</a:t>
             </a:fld>
             <a:endParaRPr lang="en-US"/>
           </a:p>
@@ -666,7 +666,7 @@
           <a:p>
             <a:fld id="{CF02990B-E4D7-9B42-913C-5A504358CBA1}" type="datetimeFigureOut">
               <a:rPr lang="en-US" smtClean="0"/>
-              <a:t>4/4/26</a:t>
+              <a:t>4/5/26</a:t>
             </a:fld>
             <a:endParaRPr lang="en-US"/>
           </a:p>
@@ -864,7 +864,7 @@
           <a:p>
             <a:fld id="{CF02990B-E4D7-9B42-913C-5A504358CBA1}" type="datetimeFigureOut">
               <a:rPr lang="en-US" smtClean="0"/>
-              <a:t>4/4/26</a:t>
+              <a:t>4/5/26</a:t>
             </a:fld>
             <a:endParaRPr lang="en-US"/>
           </a:p>
@@ -1139,7 +1139,7 @@
           <a:p>
             <a:fld id="{CF02990B-E4D7-9B42-913C-5A504358CBA1}" type="datetimeFigureOut">
               <a:rPr lang="en-US" smtClean="0"/>
-              <a:t>4/4/26</a:t>
+              <a:t>4/5/26</a:t>
             </a:fld>
             <a:endParaRPr lang="en-US"/>
           </a:p>
@@ -1404,7 +1404,7 @@
           <a:p>
             <a:fld id="{CF02990B-E4D7-9B42-913C-5A504358CBA1}" type="datetimeFigureOut">
               <a:rPr lang="en-US" smtClean="0"/>
-              <a:t>4/4/26</a:t>
+              <a:t>4/5/26</a:t>
             </a:fld>
             <a:endParaRPr lang="en-US"/>
           </a:p>
@@ -1816,7 +1816,7 @@
           <a:p>
             <a:fld id="{CF02990B-E4D7-9B42-913C-5A504358CBA1}" type="datetimeFigureOut">
               <a:rPr lang="en-US" smtClean="0"/>
-              <a:t>4/4/26</a:t>
+              <a:t>4/5/26</a:t>
             </a:fld>
             <a:endParaRPr lang="en-US"/>
           </a:p>
@@ -1957,7 +1957,7 @@
           <a:p>
             <a:fld id="{CF02990B-E4D7-9B42-913C-5A504358CBA1}" type="datetimeFigureOut">
               <a:rPr lang="en-US" smtClean="0"/>
-              <a:t>4/4/26</a:t>
+              <a:t>4/5/26</a:t>
             </a:fld>
             <a:endParaRPr lang="en-US"/>
           </a:p>
@@ -2070,7 +2070,7 @@
           <a:p>
             <a:fld id="{CF02990B-E4D7-9B42-913C-5A504358CBA1}" type="datetimeFigureOut">
               <a:rPr lang="en-US" smtClean="0"/>
-              <a:t>4/4/26</a:t>
+              <a:t>4/5/26</a:t>
             </a:fld>
             <a:endParaRPr lang="en-US"/>
           </a:p>
@@ -2381,7 +2381,7 @@
           <a:p>
             <a:fld id="{CF02990B-E4D7-9B42-913C-5A504358CBA1}" type="datetimeFigureOut">
               <a:rPr lang="en-US" smtClean="0"/>
-              <a:t>4/4/26</a:t>
+              <a:t>4/5/26</a:t>
             </a:fld>
             <a:endParaRPr lang="en-US"/>
           </a:p>
@@ -2669,7 +2669,7 @@
           <a:p>
             <a:fld id="{CF02990B-E4D7-9B42-913C-5A504358CBA1}" type="datetimeFigureOut">
               <a:rPr lang="en-US" smtClean="0"/>
-              <a:t>4/4/26</a:t>
+              <a:t>4/5/26</a:t>
             </a:fld>
             <a:endParaRPr lang="en-US"/>
           </a:p>
@@ -2910,7 +2910,7 @@
           <a:p>
             <a:fld id="{CF02990B-E4D7-9B42-913C-5A504358CBA1}" type="datetimeFigureOut">
               <a:rPr lang="en-US" smtClean="0"/>
-              <a:t>4/4/26</a:t>
+              <a:t>4/5/26</a:t>
             </a:fld>
             <a:endParaRPr lang="en-US"/>
           </a:p>
@@ -3532,7 +3532,7 @@
             </a:r>
             <a:r>
               <a:rPr lang="en-US" dirty="0"/>
-              <a:t>/file/d/1cwbVZ1vuR3hBV6mNGIj6tzpRRlQh1d3c/</a:t>
+              <a:t>/file/d/1kmnDsk0c8T7A-AwAa-VMPX-5vrpSN2yL/</a:t>
             </a:r>
             <a:r>
               <a:rPr lang="en-US" dirty="0" err="1"/>
